--- a/Final/Figures/wavepacket1.pptx
+++ b/Final/Figures/wavepacket1.pptx
@@ -252,7 +252,7 @@
           <a:p>
             <a:fld id="{B4A272A4-1B6B-4C0A-B74D-70EF2D8C7D55}" type="datetimeFigureOut">
               <a:rPr lang="zh-TW" altLang="en-US" smtClean="0"/>
-              <a:t>2026/5/25</a:t>
+              <a:t>2026/7/1</a:t>
             </a:fld>
             <a:endParaRPr lang="zh-TW" altLang="en-US"/>
           </a:p>
@@ -422,7 +422,7 @@
           <a:p>
             <a:fld id="{B4A272A4-1B6B-4C0A-B74D-70EF2D8C7D55}" type="datetimeFigureOut">
               <a:rPr lang="zh-TW" altLang="en-US" smtClean="0"/>
-              <a:t>2026/5/25</a:t>
+              <a:t>2026/7/1</a:t>
             </a:fld>
             <a:endParaRPr lang="zh-TW" altLang="en-US"/>
           </a:p>
@@ -602,7 +602,7 @@
           <a:p>
             <a:fld id="{B4A272A4-1B6B-4C0A-B74D-70EF2D8C7D55}" type="datetimeFigureOut">
               <a:rPr lang="zh-TW" altLang="en-US" smtClean="0"/>
-              <a:t>2026/5/25</a:t>
+              <a:t>2026/7/1</a:t>
             </a:fld>
             <a:endParaRPr lang="zh-TW" altLang="en-US"/>
           </a:p>
@@ -772,7 +772,7 @@
           <a:p>
             <a:fld id="{B4A272A4-1B6B-4C0A-B74D-70EF2D8C7D55}" type="datetimeFigureOut">
               <a:rPr lang="zh-TW" altLang="en-US" smtClean="0"/>
-              <a:t>2026/5/25</a:t>
+              <a:t>2026/7/1</a:t>
             </a:fld>
             <a:endParaRPr lang="zh-TW" altLang="en-US"/>
           </a:p>
@@ -1018,7 +1018,7 @@
           <a:p>
             <a:fld id="{B4A272A4-1B6B-4C0A-B74D-70EF2D8C7D55}" type="datetimeFigureOut">
               <a:rPr lang="zh-TW" altLang="en-US" smtClean="0"/>
-              <a:t>2026/5/25</a:t>
+              <a:t>2026/7/1</a:t>
             </a:fld>
             <a:endParaRPr lang="zh-TW" altLang="en-US"/>
           </a:p>
@@ -1250,7 +1250,7 @@
           <a:p>
             <a:fld id="{B4A272A4-1B6B-4C0A-B74D-70EF2D8C7D55}" type="datetimeFigureOut">
               <a:rPr lang="zh-TW" altLang="en-US" smtClean="0"/>
-              <a:t>2026/5/25</a:t>
+              <a:t>2026/7/1</a:t>
             </a:fld>
             <a:endParaRPr lang="zh-TW" altLang="en-US"/>
           </a:p>
@@ -1617,7 +1617,7 @@
           <a:p>
             <a:fld id="{B4A272A4-1B6B-4C0A-B74D-70EF2D8C7D55}" type="datetimeFigureOut">
               <a:rPr lang="zh-TW" altLang="en-US" smtClean="0"/>
-              <a:t>2026/5/25</a:t>
+              <a:t>2026/7/1</a:t>
             </a:fld>
             <a:endParaRPr lang="zh-TW" altLang="en-US"/>
           </a:p>
@@ -1735,7 +1735,7 @@
           <a:p>
             <a:fld id="{B4A272A4-1B6B-4C0A-B74D-70EF2D8C7D55}" type="datetimeFigureOut">
               <a:rPr lang="zh-TW" altLang="en-US" smtClean="0"/>
-              <a:t>2026/5/25</a:t>
+              <a:t>2026/7/1</a:t>
             </a:fld>
             <a:endParaRPr lang="zh-TW" altLang="en-US"/>
           </a:p>
@@ -1830,7 +1830,7 @@
           <a:p>
             <a:fld id="{B4A272A4-1B6B-4C0A-B74D-70EF2D8C7D55}" type="datetimeFigureOut">
               <a:rPr lang="zh-TW" altLang="en-US" smtClean="0"/>
-              <a:t>2026/5/25</a:t>
+              <a:t>2026/7/1</a:t>
             </a:fld>
             <a:endParaRPr lang="zh-TW" altLang="en-US"/>
           </a:p>
@@ -2107,7 +2107,7 @@
           <a:p>
             <a:fld id="{B4A272A4-1B6B-4C0A-B74D-70EF2D8C7D55}" type="datetimeFigureOut">
               <a:rPr lang="zh-TW" altLang="en-US" smtClean="0"/>
-              <a:t>2026/5/25</a:t>
+              <a:t>2026/7/1</a:t>
             </a:fld>
             <a:endParaRPr lang="zh-TW" altLang="en-US"/>
           </a:p>
@@ -2364,7 +2364,7 @@
           <a:p>
             <a:fld id="{B4A272A4-1B6B-4C0A-B74D-70EF2D8C7D55}" type="datetimeFigureOut">
               <a:rPr lang="zh-TW" altLang="en-US" smtClean="0"/>
-              <a:t>2026/5/25</a:t>
+              <a:t>2026/7/1</a:t>
             </a:fld>
             <a:endParaRPr lang="zh-TW" altLang="en-US"/>
           </a:p>
@@ -2577,7 +2577,7 @@
           <a:p>
             <a:fld id="{B4A272A4-1B6B-4C0A-B74D-70EF2D8C7D55}" type="datetimeFigureOut">
               <a:rPr lang="zh-TW" altLang="en-US" smtClean="0"/>
-              <a:t>2026/5/25</a:t>
+              <a:t>2026/7/1</a:t>
             </a:fld>
             <a:endParaRPr lang="zh-TW" altLang="en-US"/>
           </a:p>
@@ -3117,245 +3117,8 @@
             </a:prstGeom>
           </p:spPr>
         </p:pic>
-        <mc:AlternateContent xmlns:mc="http://schemas.openxmlformats.org/markup-compatibility/2006">
-          <mc:Choice xmlns:a14="http://schemas.microsoft.com/office/drawing/2010/main" Requires="a14">
-            <p:sp>
-              <p:nvSpPr>
-                <p:cNvPr id="38" name="矩形 37">
-                  <a:extLst>
-                    <a:ext uri="{FF2B5EF4-FFF2-40B4-BE49-F238E27FC236}">
-                      <a16:creationId xmlns:a16="http://schemas.microsoft.com/office/drawing/2014/main" id="{ED99895A-7756-4CEE-A914-73F36DFFCE5B}"/>
-                    </a:ext>
-                  </a:extLst>
-                </p:cNvPr>
-                <p:cNvSpPr/>
-                <p:nvPr/>
-              </p:nvSpPr>
-              <p:spPr>
-                <a:xfrm>
-                  <a:off x="3207255" y="1512836"/>
-                  <a:ext cx="1946302" cy="500522"/>
-                </a:xfrm>
-                <a:prstGeom prst="rect">
-                  <a:avLst/>
-                </a:prstGeom>
-              </p:spPr>
-              <p:txBody>
-                <a:bodyPr wrap="none">
-                  <a:spAutoFit/>
-                </a:bodyPr>
-                <a:lstStyle/>
-                <a:p>
-                  <a:pPr algn="r"/>
-                  <a14:m>
-                    <m:oMathPara xmlns:m="http://schemas.openxmlformats.org/officeDocument/2006/math">
-                      <m:oMathParaPr>
-                        <m:jc m:val="centerGroup"/>
-                      </m:oMathParaPr>
-                      <m:oMath xmlns:m="http://schemas.openxmlformats.org/officeDocument/2006/math">
-                        <m:sSup>
-                          <m:sSupPr>
-                            <m:ctrlPr>
-                              <a:rPr lang="en-US" altLang="zh-TW" sz="2000" b="1" i="1">
-                                <a:latin typeface="Cambria Math" panose="02040503050406030204" pitchFamily="18" charset="0"/>
-                              </a:rPr>
-                            </m:ctrlPr>
-                          </m:sSupPr>
-                          <m:e>
-                            <m:d>
-                              <m:dPr>
-                                <m:begChr m:val="|"/>
-                                <m:endChr m:val="|"/>
-                                <m:ctrlPr>
-                                  <a:rPr lang="en-US" altLang="zh-TW" sz="2000" b="1" i="1">
-                                    <a:latin typeface="Cambria Math" panose="02040503050406030204" pitchFamily="18" charset="0"/>
-                                  </a:rPr>
-                                </m:ctrlPr>
-                              </m:dPr>
-                              <m:e>
-                                <m:sSub>
-                                  <m:sSubPr>
-                                    <m:ctrlPr>
-                                      <a:rPr lang="en-US" altLang="zh-TW" sz="2000" i="1" dirty="0">
-                                        <a:latin typeface="Cambria Math" panose="02040503050406030204" pitchFamily="18" charset="0"/>
-                                      </a:rPr>
-                                    </m:ctrlPr>
-                                  </m:sSubPr>
-                                  <m:e>
-                                    <m:acc>
-                                      <m:accPr>
-                                        <m:chr m:val="̃"/>
-                                        <m:ctrlPr>
-                                          <a:rPr lang="en-US" altLang="zh-TW" sz="2000" i="1">
-                                            <a:latin typeface="Cambria Math" panose="02040503050406030204" pitchFamily="18" charset="0"/>
-                                          </a:rPr>
-                                        </m:ctrlPr>
-                                      </m:accPr>
-                                      <m:e>
-                                        <m:r>
-                                          <a:rPr lang="en-US" altLang="zh-TW" sz="2000" i="1">
-                                            <a:latin typeface="Cambria Math" panose="02040503050406030204" pitchFamily="18" charset="0"/>
-                                          </a:rPr>
-                                          <m:t>𝐹</m:t>
-                                        </m:r>
-                                      </m:e>
-                                    </m:acc>
-                                  </m:e>
-                                  <m:sub>
-                                    <m:r>
-                                      <a:rPr lang="en-US" altLang="zh-TW" sz="2000" i="1">
-                                        <a:latin typeface="Cambria Math" panose="02040503050406030204" pitchFamily="18" charset="0"/>
-                                      </a:rPr>
-                                      <m:t>0</m:t>
-                                    </m:r>
-                                    <m:r>
-                                      <a:rPr lang="en-US" altLang="zh-TW" sz="2000" i="1" dirty="0">
-                                        <a:latin typeface="Cambria Math" panose="02040503050406030204" pitchFamily="18" charset="0"/>
-                                      </a:rPr>
-                                      <m:t>,0</m:t>
-                                    </m:r>
-                                  </m:sub>
-                                </m:sSub>
-                                <m:d>
-                                  <m:dPr>
-                                    <m:ctrlPr>
-                                      <a:rPr lang="en-US" altLang="zh-TW" sz="2000" i="1" dirty="0">
-                                        <a:latin typeface="Cambria Math" panose="02040503050406030204" pitchFamily="18" charset="0"/>
-                                      </a:rPr>
-                                    </m:ctrlPr>
-                                  </m:dPr>
-                                  <m:e>
-                                    <m:r>
-                                      <a:rPr lang="en-US" altLang="zh-TW" sz="2000" b="1" i="1">
-                                        <a:latin typeface="Cambria Math" panose="02040503050406030204" pitchFamily="18" charset="0"/>
-                                      </a:rPr>
-                                      <m:t>𝑸</m:t>
-                                    </m:r>
-                                  </m:e>
-                                </m:d>
-                                <m:sSup>
-                                  <m:sSupPr>
-                                    <m:ctrlPr>
-                                      <a:rPr lang="en-US" altLang="zh-TW" sz="2000" i="1" dirty="0">
-                                        <a:latin typeface="Cambria Math" panose="02040503050406030204" pitchFamily="18" charset="0"/>
-                                      </a:rPr>
-                                    </m:ctrlPr>
-                                  </m:sSupPr>
-                                  <m:e>
-                                    <m:r>
-                                      <a:rPr lang="en-US" altLang="zh-TW" sz="2000" i="1" dirty="0">
-                                        <a:latin typeface="Cambria Math" panose="02040503050406030204" pitchFamily="18" charset="0"/>
-                                      </a:rPr>
-                                      <m:t>𝑒</m:t>
-                                    </m:r>
-                                  </m:e>
-                                  <m:sup>
-                                    <m:r>
-                                      <a:rPr lang="en-US" altLang="zh-TW" sz="2000" i="1" dirty="0">
-                                        <a:latin typeface="Cambria Math" panose="02040503050406030204" pitchFamily="18" charset="0"/>
-                                      </a:rPr>
-                                      <m:t>𝑖</m:t>
-                                    </m:r>
-                                    <m:r>
-                                      <a:rPr lang="en-US" altLang="zh-TW" sz="2000" i="1" dirty="0">
-                                        <a:latin typeface="Cambria Math" panose="02040503050406030204" pitchFamily="18" charset="0"/>
-                                      </a:rPr>
-                                      <m:t>ℓ</m:t>
-                                    </m:r>
-                                    <m:sSub>
-                                      <m:sSubPr>
-                                        <m:ctrlPr>
-                                          <a:rPr lang="en-US" altLang="zh-TW" sz="2000" i="1" dirty="0">
-                                            <a:latin typeface="Cambria Math" panose="02040503050406030204" pitchFamily="18" charset="0"/>
-                                          </a:rPr>
-                                        </m:ctrlPr>
-                                      </m:sSubPr>
-                                      <m:e>
-                                        <m:r>
-                                          <a:rPr lang="en-US" altLang="zh-TW" sz="2000" i="1" dirty="0">
-                                            <a:latin typeface="Cambria Math" panose="02040503050406030204" pitchFamily="18" charset="0"/>
-                                          </a:rPr>
-                                          <m:t>𝜙</m:t>
-                                        </m:r>
-                                      </m:e>
-                                      <m:sub>
-                                        <m:r>
-                                          <a:rPr lang="en-US" altLang="zh-TW" sz="2000" b="1" i="1" dirty="0">
-                                            <a:latin typeface="Cambria Math" panose="02040503050406030204" pitchFamily="18" charset="0"/>
-                                          </a:rPr>
-                                          <m:t>𝑸</m:t>
-                                        </m:r>
-                                      </m:sub>
-                                    </m:sSub>
-                                  </m:sup>
-                                </m:sSup>
-                              </m:e>
-                            </m:d>
-                          </m:e>
-                          <m:sup>
-                            <m:r>
-                              <a:rPr lang="en-US" altLang="zh-TW" sz="2000" i="1">
-                                <a:latin typeface="Cambria Math" panose="02040503050406030204" pitchFamily="18" charset="0"/>
-                              </a:rPr>
-                              <m:t>2</m:t>
-                            </m:r>
-                          </m:sup>
-                        </m:sSup>
-                      </m:oMath>
-                    </m:oMathPara>
-                  </a14:m>
-                  <a:endParaRPr lang="zh-TW" altLang="en-US" sz="2000" dirty="0"/>
-                </a:p>
-              </p:txBody>
-            </p:sp>
-          </mc:Choice>
-          <mc:Fallback>
-            <p:sp>
-              <p:nvSpPr>
-                <p:cNvPr id="38" name="矩形 37">
-                  <a:extLst>
-                    <a:ext uri="{FF2B5EF4-FFF2-40B4-BE49-F238E27FC236}">
-                      <a16:creationId xmlns:a16="http://schemas.microsoft.com/office/drawing/2014/main" id="{ED99895A-7756-4CEE-A914-73F36DFFCE5B}"/>
-                    </a:ext>
-                  </a:extLst>
-                </p:cNvPr>
-                <p:cNvSpPr>
-                  <a:spLocks noRot="1" noChangeAspect="1" noMove="1" noResize="1" noEditPoints="1" noAdjustHandles="1" noChangeArrowheads="1" noChangeShapeType="1" noTextEdit="1"/>
-                </p:cNvSpPr>
-                <p:nvPr/>
-              </p:nvSpPr>
-              <p:spPr>
-                <a:xfrm>
-                  <a:off x="3207255" y="1512836"/>
-                  <a:ext cx="1946302" cy="500522"/>
-                </a:xfrm>
-                <a:prstGeom prst="rect">
-                  <a:avLst/>
-                </a:prstGeom>
-                <a:blipFill>
-                  <a:blip r:embed="rId3"/>
-                  <a:stretch>
-                    <a:fillRect/>
-                  </a:stretch>
-                </a:blipFill>
-              </p:spPr>
-              <p:txBody>
-                <a:bodyPr/>
-                <a:lstStyle/>
-                <a:p>
-                  <a:r>
-                    <a:rPr lang="zh-TW" altLang="en-US">
-                      <a:noFill/>
-                    </a:rPr>
-                    <a:t> </a:t>
-                  </a:r>
-                </a:p>
-              </p:txBody>
-            </p:sp>
-          </mc:Fallback>
-        </mc:AlternateContent>
-        <mc:AlternateContent xmlns:mc="http://schemas.openxmlformats.org/markup-compatibility/2006">
-          <mc:Choice xmlns:a14="http://schemas.microsoft.com/office/drawing/2010/main" Requires="a14">
+        <mc:AlternateContent xmlns:mc="http://schemas.openxmlformats.org/markup-compatibility/2006" xmlns:a14="http://schemas.microsoft.com/office/drawing/2010/main">
+          <mc:Choice Requires="a14">
             <p:sp>
               <p:nvSpPr>
                 <p:cNvPr id="39" name="文字方塊 38">
@@ -3430,7 +3193,7 @@
               </p:txBody>
             </p:sp>
           </mc:Choice>
-          <mc:Fallback>
+          <mc:Fallback xmlns="">
             <p:sp>
               <p:nvSpPr>
                 <p:cNvPr id="39" name="文字方塊 38">
@@ -3597,8 +3360,8 @@
             </a:p>
           </p:txBody>
         </p:sp>
-        <mc:AlternateContent xmlns:mc="http://schemas.openxmlformats.org/markup-compatibility/2006">
-          <mc:Choice xmlns:a14="http://schemas.microsoft.com/office/drawing/2010/main" Requires="a14">
+        <mc:AlternateContent xmlns:mc="http://schemas.openxmlformats.org/markup-compatibility/2006" xmlns:a14="http://schemas.microsoft.com/office/drawing/2010/main">
+          <mc:Choice Requires="a14">
             <p:sp>
               <p:nvSpPr>
                 <p:cNvPr id="42" name="文字方塊 41">
@@ -3667,7 +3430,7 @@
               </p:txBody>
             </p:sp>
           </mc:Choice>
-          <mc:Fallback>
+          <mc:Fallback xmlns="">
             <p:sp>
               <p:nvSpPr>
                 <p:cNvPr id="42" name="文字方塊 41">
@@ -3712,8 +3475,8 @@
             </p:sp>
           </mc:Fallback>
         </mc:AlternateContent>
-        <mc:AlternateContent xmlns:mc="http://schemas.openxmlformats.org/markup-compatibility/2006">
-          <mc:Choice xmlns:a14="http://schemas.microsoft.com/office/drawing/2010/main" Requires="a14">
+        <mc:AlternateContent xmlns:mc="http://schemas.openxmlformats.org/markup-compatibility/2006" xmlns:a14="http://schemas.microsoft.com/office/drawing/2010/main">
+          <mc:Choice Requires="a14">
             <p:sp>
               <p:nvSpPr>
                 <p:cNvPr id="43" name="文字方塊 42">
@@ -3782,7 +3545,7 @@
               </p:txBody>
             </p:sp>
           </mc:Choice>
-          <mc:Fallback>
+          <mc:Fallback xmlns="">
             <p:sp>
               <p:nvSpPr>
                 <p:cNvPr id="43" name="文字方塊 42">
@@ -3828,6 +3591,282 @@
           </mc:Fallback>
         </mc:AlternateContent>
       </p:grpSp>
+      <mc:AlternateContent xmlns:mc="http://schemas.openxmlformats.org/markup-compatibility/2006">
+        <mc:Choice xmlns:a14="http://schemas.microsoft.com/office/drawing/2010/main" Requires="a14">
+          <p:sp>
+            <p:nvSpPr>
+              <p:cNvPr id="11" name="矩形 10">
+                <a:extLst>
+                  <a:ext uri="{FF2B5EF4-FFF2-40B4-BE49-F238E27FC236}">
+                    <a16:creationId xmlns:a16="http://schemas.microsoft.com/office/drawing/2014/main" id="{6CC4F380-BB2F-421C-8CFB-423E664AB923}"/>
+                  </a:ext>
+                </a:extLst>
+              </p:cNvPr>
+              <p:cNvSpPr/>
+              <p:nvPr/>
+            </p:nvSpPr>
+            <p:spPr>
+              <a:xfrm>
+                <a:off x="3207259" y="-921550"/>
+                <a:ext cx="1946302" cy="500522"/>
+              </a:xfrm>
+              <a:prstGeom prst="rect">
+                <a:avLst/>
+              </a:prstGeom>
+            </p:spPr>
+            <p:txBody>
+              <a:bodyPr wrap="none">
+                <a:spAutoFit/>
+              </a:bodyPr>
+              <a:lstStyle/>
+              <a:p>
+                <a:pPr algn="r"/>
+                <a14:m>
+                  <m:oMathPara xmlns:m="http://schemas.openxmlformats.org/officeDocument/2006/math">
+                    <m:oMathParaPr>
+                      <m:jc m:val="centerGroup"/>
+                    </m:oMathParaPr>
+                    <m:oMath xmlns:m="http://schemas.openxmlformats.org/officeDocument/2006/math">
+                      <m:sSup>
+                        <m:sSupPr>
+                          <m:ctrlPr>
+                            <a:rPr lang="en-US" altLang="zh-TW" sz="2000" b="1" i="1">
+                              <a:latin typeface="Cambria Math" panose="02040503050406030204" pitchFamily="18" charset="0"/>
+                            </a:rPr>
+                          </m:ctrlPr>
+                        </m:sSupPr>
+                        <m:e>
+                          <m:d>
+                            <m:dPr>
+                              <m:begChr m:val="|"/>
+                              <m:endChr m:val="|"/>
+                              <m:ctrlPr>
+                                <a:rPr lang="en-US" altLang="zh-TW" sz="2000" b="1" i="1">
+                                  <a:latin typeface="Cambria Math" panose="02040503050406030204" pitchFamily="18" charset="0"/>
+                                </a:rPr>
+                              </m:ctrlPr>
+                            </m:dPr>
+                            <m:e>
+                              <m:sSub>
+                                <m:sSubPr>
+                                  <m:ctrlPr>
+                                    <a:rPr lang="en-US" altLang="zh-TW" sz="2000" i="1" dirty="0">
+                                      <a:latin typeface="Cambria Math" panose="02040503050406030204" pitchFamily="18" charset="0"/>
+                                    </a:rPr>
+                                  </m:ctrlPr>
+                                </m:sSubPr>
+                                <m:e>
+                                  <m:acc>
+                                    <m:accPr>
+                                      <m:chr m:val="̃"/>
+                                      <m:ctrlPr>
+                                        <a:rPr lang="en-US" altLang="zh-TW" sz="2000" i="1">
+                                          <a:latin typeface="Cambria Math" panose="02040503050406030204" pitchFamily="18" charset="0"/>
+                                        </a:rPr>
+                                      </m:ctrlPr>
+                                    </m:accPr>
+                                    <m:e>
+                                      <m:r>
+                                        <a:rPr lang="en-US" altLang="zh-TW" sz="2000" i="1">
+                                          <a:latin typeface="Cambria Math" panose="02040503050406030204" pitchFamily="18" charset="0"/>
+                                        </a:rPr>
+                                        <m:t>𝐹</m:t>
+                                      </m:r>
+                                    </m:e>
+                                  </m:acc>
+                                </m:e>
+                                <m:sub>
+                                  <m:r>
+                                    <a:rPr lang="en-US" altLang="zh-TW" sz="2000" i="1">
+                                      <a:latin typeface="Cambria Math" panose="02040503050406030204" pitchFamily="18" charset="0"/>
+                                    </a:rPr>
+                                    <m:t>0</m:t>
+                                  </m:r>
+                                  <m:r>
+                                    <a:rPr lang="en-US" altLang="zh-TW" sz="2000" i="1" dirty="0">
+                                      <a:latin typeface="Cambria Math" panose="02040503050406030204" pitchFamily="18" charset="0"/>
+                                    </a:rPr>
+                                    <m:t>,0</m:t>
+                                  </m:r>
+                                </m:sub>
+                              </m:sSub>
+                              <m:d>
+                                <m:dPr>
+                                  <m:ctrlPr>
+                                    <a:rPr lang="en-US" altLang="zh-TW" sz="2000" i="1" dirty="0">
+                                      <a:latin typeface="Cambria Math" panose="02040503050406030204" pitchFamily="18" charset="0"/>
+                                    </a:rPr>
+                                  </m:ctrlPr>
+                                </m:dPr>
+                                <m:e>
+                                  <m:r>
+                                    <a:rPr lang="en-US" altLang="zh-TW" sz="2000" b="1" i="1">
+                                      <a:latin typeface="Cambria Math" panose="02040503050406030204" pitchFamily="18" charset="0"/>
+                                    </a:rPr>
+                                    <m:t>𝑸</m:t>
+                                  </m:r>
+                                </m:e>
+                              </m:d>
+                              <m:sSup>
+                                <m:sSupPr>
+                                  <m:ctrlPr>
+                                    <a:rPr lang="en-US" altLang="zh-TW" sz="2000" i="1" dirty="0">
+                                      <a:latin typeface="Cambria Math" panose="02040503050406030204" pitchFamily="18" charset="0"/>
+                                    </a:rPr>
+                                  </m:ctrlPr>
+                                </m:sSupPr>
+                                <m:e>
+                                  <m:r>
+                                    <a:rPr lang="en-US" altLang="zh-TW" sz="2000" i="1" dirty="0">
+                                      <a:latin typeface="Cambria Math" panose="02040503050406030204" pitchFamily="18" charset="0"/>
+                                    </a:rPr>
+                                    <m:t>𝑒</m:t>
+                                  </m:r>
+                                </m:e>
+                                <m:sup>
+                                  <m:r>
+                                    <a:rPr lang="en-US" altLang="zh-TW" sz="2000" i="1" dirty="0">
+                                      <a:latin typeface="Cambria Math" panose="02040503050406030204" pitchFamily="18" charset="0"/>
+                                    </a:rPr>
+                                    <m:t>𝑖</m:t>
+                                  </m:r>
+                                  <m:r>
+                                    <a:rPr lang="en-US" altLang="zh-TW" sz="2000" i="1" dirty="0">
+                                      <a:latin typeface="Cambria Math" panose="02040503050406030204" pitchFamily="18" charset="0"/>
+                                    </a:rPr>
+                                    <m:t>ℓ</m:t>
+                                  </m:r>
+                                  <m:sSub>
+                                    <m:sSubPr>
+                                      <m:ctrlPr>
+                                        <a:rPr lang="en-US" altLang="zh-TW" sz="2000" i="1" dirty="0">
+                                          <a:latin typeface="Cambria Math" panose="02040503050406030204" pitchFamily="18" charset="0"/>
+                                        </a:rPr>
+                                      </m:ctrlPr>
+                                    </m:sSubPr>
+                                    <m:e>
+                                      <m:r>
+                                        <a:rPr lang="en-US" altLang="zh-TW" sz="2000" i="1" dirty="0">
+                                          <a:latin typeface="Cambria Math" panose="02040503050406030204" pitchFamily="18" charset="0"/>
+                                        </a:rPr>
+                                        <m:t>𝜙</m:t>
+                                      </m:r>
+                                    </m:e>
+                                    <m:sub>
+                                      <m:r>
+                                        <a:rPr lang="en-US" altLang="zh-TW" sz="2000" b="1" i="1" dirty="0">
+                                          <a:latin typeface="Cambria Math" panose="02040503050406030204" pitchFamily="18" charset="0"/>
+                                        </a:rPr>
+                                        <m:t>𝑸</m:t>
+                                      </m:r>
+                                    </m:sub>
+                                  </m:sSub>
+                                </m:sup>
+                              </m:sSup>
+                            </m:e>
+                          </m:d>
+                        </m:e>
+                        <m:sup>
+                          <m:r>
+                            <a:rPr lang="en-US" altLang="zh-TW" sz="2000" i="1">
+                              <a:latin typeface="Cambria Math" panose="02040503050406030204" pitchFamily="18" charset="0"/>
+                            </a:rPr>
+                            <m:t>2</m:t>
+                          </m:r>
+                        </m:sup>
+                      </m:sSup>
+                    </m:oMath>
+                  </m:oMathPara>
+                </a14:m>
+                <a:endParaRPr lang="zh-TW" altLang="en-US" sz="2000" dirty="0"/>
+              </a:p>
+            </p:txBody>
+          </p:sp>
+        </mc:Choice>
+        <mc:Fallback>
+          <p:sp>
+            <p:nvSpPr>
+              <p:cNvPr id="11" name="矩形 10">
+                <a:extLst>
+                  <a:ext uri="{FF2B5EF4-FFF2-40B4-BE49-F238E27FC236}">
+                    <a16:creationId xmlns:a16="http://schemas.microsoft.com/office/drawing/2014/main" id="{6CC4F380-BB2F-421C-8CFB-423E664AB923}"/>
+                  </a:ext>
+                </a:extLst>
+              </p:cNvPr>
+              <p:cNvSpPr>
+                <a:spLocks noRot="1" noChangeAspect="1" noMove="1" noResize="1" noEditPoints="1" noAdjustHandles="1" noChangeArrowheads="1" noChangeShapeType="1" noTextEdit="1"/>
+              </p:cNvSpPr>
+              <p:nvPr/>
+            </p:nvSpPr>
+            <p:spPr>
+              <a:xfrm>
+                <a:off x="3207259" y="-921550"/>
+                <a:ext cx="1946302" cy="500522"/>
+              </a:xfrm>
+              <a:prstGeom prst="rect">
+                <a:avLst/>
+              </a:prstGeom>
+              <a:blipFill>
+                <a:blip r:embed="rId7"/>
+                <a:stretch>
+                  <a:fillRect/>
+                </a:stretch>
+              </a:blipFill>
+            </p:spPr>
+            <p:txBody>
+              <a:bodyPr/>
+              <a:lstStyle/>
+              <a:p>
+                <a:r>
+                  <a:rPr lang="zh-TW" altLang="en-US">
+                    <a:noFill/>
+                  </a:rPr>
+                  <a:t> </a:t>
+                </a:r>
+              </a:p>
+            </p:txBody>
+          </p:sp>
+        </mc:Fallback>
+      </mc:AlternateContent>
+      <p:pic>
+        <p:nvPicPr>
+          <p:cNvPr id="4" name="圖形 3">
+            <a:extLst>
+              <a:ext uri="{FF2B5EF4-FFF2-40B4-BE49-F238E27FC236}">
+                <a16:creationId xmlns:a16="http://schemas.microsoft.com/office/drawing/2014/main" id="{D61A9AD8-03DD-4FF6-9C5E-71C4F409BE99}"/>
+              </a:ext>
+            </a:extLst>
+          </p:cNvPr>
+          <p:cNvPicPr>
+            <a:picLocks noChangeAspect="1"/>
+          </p:cNvPicPr>
+          <p:nvPr/>
+        </p:nvPicPr>
+        <p:blipFill>
+          <a:blip r:embed="rId8">
+            <a:extLst>
+              <a:ext uri="{28A0092B-C50C-407E-A947-70E740481C1C}">
+                <a14:useLocalDpi xmlns:a14="http://schemas.microsoft.com/office/drawing/2010/main" val="0"/>
+              </a:ext>
+              <a:ext uri="{96DAC541-7B7A-43D3-8B79-37D633B846F1}">
+                <asvg:svgBlip xmlns:asvg="http://schemas.microsoft.com/office/drawing/2016/SVG/main" r:embed="rId9"/>
+              </a:ext>
+            </a:extLst>
+          </a:blip>
+          <a:stretch>
+            <a:fillRect/>
+          </a:stretch>
+        </p:blipFill>
+        <p:spPr>
+          <a:xfrm>
+            <a:off x="3297618" y="534256"/>
+            <a:ext cx="1578807" cy="701692"/>
+          </a:xfrm>
+          <a:prstGeom prst="rect">
+            <a:avLst/>
+          </a:prstGeom>
+        </p:spPr>
+      </p:pic>
     </p:spTree>
     <p:extLst>
       <p:ext uri="{BB962C8B-B14F-4D97-AF65-F5344CB8AC3E}">
@@ -4043,8 +4082,8 @@
           </a:prstGeom>
         </p:spPr>
       </p:pic>
-      <mc:AlternateContent xmlns:mc="http://schemas.openxmlformats.org/markup-compatibility/2006">
-        <mc:Choice xmlns:a14="http://schemas.microsoft.com/office/drawing/2010/main" Requires="a14">
+      <mc:AlternateContent xmlns:mc="http://schemas.openxmlformats.org/markup-compatibility/2006" xmlns:a14="http://schemas.microsoft.com/office/drawing/2010/main">
+        <mc:Choice Requires="a14">
           <p:sp>
             <p:nvSpPr>
               <p:cNvPr id="8" name="矩形 7">
@@ -4200,13 +4239,7 @@
                                     <a:rPr lang="en-US" altLang="zh-TW" sz="2000" i="1">
                                       <a:latin typeface="Cambria Math" panose="02040503050406030204" pitchFamily="18" charset="0"/>
                                     </a:rPr>
-                                    <m:t>,</m:t>
-                                  </m:r>
-                                  <m:r>
-                                    <a:rPr lang="en-US" altLang="zh-TW" sz="2000" i="1">
-                                      <a:latin typeface="Cambria Math" panose="02040503050406030204" pitchFamily="18" charset="0"/>
-                                    </a:rPr>
-                                    <m:t>1</m:t>
+                                    <m:t>,1</m:t>
                                   </m:r>
                                 </m:sup>
                               </m:sSubSup>
@@ -4236,7 +4269,7 @@
             </p:txBody>
           </p:sp>
         </mc:Choice>
-        <mc:Fallback>
+        <mc:Fallback xmlns="">
           <p:sp>
             <p:nvSpPr>
               <p:cNvPr id="8" name="矩形 7">
@@ -4281,8 +4314,8 @@
           </p:sp>
         </mc:Fallback>
       </mc:AlternateContent>
-      <mc:AlternateContent xmlns:mc="http://schemas.openxmlformats.org/markup-compatibility/2006">
-        <mc:Choice xmlns:a14="http://schemas.microsoft.com/office/drawing/2010/main" Requires="a14">
+      <mc:AlternateContent xmlns:mc="http://schemas.openxmlformats.org/markup-compatibility/2006" xmlns:a14="http://schemas.microsoft.com/office/drawing/2010/main">
+        <mc:Choice Requires="a14">
           <p:sp>
             <p:nvSpPr>
               <p:cNvPr id="18" name="矩形 17">
@@ -4470,14 +4503,7 @@
                                           <a:latin typeface="Cambria Math" panose="02040503050406030204" pitchFamily="18" charset="0"/>
                                           <a:cs typeface="Times New Roman" panose="02020603050405020304" pitchFamily="18" charset="0"/>
                                         </a:rPr>
-                                        <m:t>, </m:t>
-                                      </m:r>
-                                      <m:r>
-                                        <a:rPr lang="en-US" altLang="zh-TW" sz="2000" i="1" dirty="0">
-                                          <a:latin typeface="Cambria Math" panose="02040503050406030204" pitchFamily="18" charset="0"/>
-                                          <a:cs typeface="Times New Roman" panose="02020603050405020304" pitchFamily="18" charset="0"/>
-                                        </a:rPr>
-                                        <m:t>1</m:t>
+                                        <m:t>, 1</m:t>
                                       </m:r>
                                     </m:sup>
                                   </m:sSubSup>
@@ -4571,7 +4597,7 @@
             </p:txBody>
           </p:sp>
         </mc:Choice>
-        <mc:Fallback>
+        <mc:Fallback xmlns="">
           <p:sp>
             <p:nvSpPr>
               <p:cNvPr id="18" name="矩形 17">
@@ -4616,8 +4642,8 @@
           </p:sp>
         </mc:Fallback>
       </mc:AlternateContent>
-      <mc:AlternateContent xmlns:mc="http://schemas.openxmlformats.org/markup-compatibility/2006">
-        <mc:Choice xmlns:a14="http://schemas.microsoft.com/office/drawing/2010/main" Requires="a14">
+      <mc:AlternateContent xmlns:mc="http://schemas.openxmlformats.org/markup-compatibility/2006" xmlns:a14="http://schemas.microsoft.com/office/drawing/2010/main">
+        <mc:Choice Requires="a14">
           <p:sp>
             <p:nvSpPr>
               <p:cNvPr id="19" name="矩形 18">
@@ -4678,7 +4704,7 @@
             </p:txBody>
           </p:sp>
         </mc:Choice>
-        <mc:Fallback>
+        <mc:Fallback xmlns="">
           <p:sp>
             <p:nvSpPr>
               <p:cNvPr id="19" name="矩形 18">
@@ -4723,8 +4749,8 @@
           </p:sp>
         </mc:Fallback>
       </mc:AlternateContent>
-      <mc:AlternateContent xmlns:mc="http://schemas.openxmlformats.org/markup-compatibility/2006">
-        <mc:Choice xmlns:a14="http://schemas.microsoft.com/office/drawing/2010/main" Requires="a14">
+      <mc:AlternateContent xmlns:mc="http://schemas.openxmlformats.org/markup-compatibility/2006" xmlns:a14="http://schemas.microsoft.com/office/drawing/2010/main">
+        <mc:Choice Requires="a14">
           <p:sp>
             <p:nvSpPr>
               <p:cNvPr id="20" name="矩形 19">
@@ -4791,7 +4817,7 @@
             </p:txBody>
           </p:sp>
         </mc:Choice>
-        <mc:Fallback>
+        <mc:Fallback xmlns="">
           <p:sp>
             <p:nvSpPr>
               <p:cNvPr id="20" name="矩形 19">
@@ -5347,13 +5373,7 @@
                                       <a:rPr lang="en-US" altLang="zh-TW" sz="2000" i="1">
                                         <a:latin typeface="Cambria Math" panose="02040503050406030204" pitchFamily="18" charset="0"/>
                                       </a:rPr>
-                                      <m:t>,</m:t>
-                                    </m:r>
-                                    <m:r>
-                                      <a:rPr lang="en-US" altLang="zh-TW" sz="2000" i="1">
-                                        <a:latin typeface="Cambria Math" panose="02040503050406030204" pitchFamily="18" charset="0"/>
-                                      </a:rPr>
-                                      <m:t>0</m:t>
+                                      <m:t>,0</m:t>
                                     </m:r>
                                   </m:sup>
                                 </m:sSubSup>
@@ -5979,28 +5999,7 @@
                                             <a:latin typeface="Cambria Math" panose="02040503050406030204" pitchFamily="18" charset="0"/>
                                             <a:cs typeface="Times New Roman" panose="02020603050405020304" pitchFamily="18" charset="0"/>
                                           </a:rPr>
-                                          <m:t>, </m:t>
-                                        </m:r>
-                                        <m:r>
-                                          <a:rPr lang="en-US" altLang="zh-TW" sz="2000" i="1" dirty="0">
-                                            <a:latin typeface="Cambria Math" panose="02040503050406030204" pitchFamily="18" charset="0"/>
-                                            <a:cs typeface="Times New Roman" panose="02020603050405020304" pitchFamily="18" charset="0"/>
-                                          </a:rPr>
-                                          <m:t>0</m:t>
-                                        </m:r>
-                                        <m:r>
-                                          <a:rPr lang="en-US" altLang="zh-TW" sz="2000" i="1" dirty="0">
-                                            <a:latin typeface="Cambria Math" panose="02040503050406030204" pitchFamily="18" charset="0"/>
-                                            <a:cs typeface="Times New Roman" panose="02020603050405020304" pitchFamily="18" charset="0"/>
-                                          </a:rPr>
-                                          <m:t>,</m:t>
-                                        </m:r>
-                                        <m:r>
-                                          <a:rPr lang="en-US" altLang="zh-TW" sz="2000" i="1" dirty="0">
-                                            <a:latin typeface="Cambria Math" panose="02040503050406030204" pitchFamily="18" charset="0"/>
-                                            <a:cs typeface="Times New Roman" panose="02020603050405020304" pitchFamily="18" charset="0"/>
-                                          </a:rPr>
-                                          <m:t>0</m:t>
+                                          <m:t>, 0,0</m:t>
                                         </m:r>
                                       </m:sup>
                                     </m:sSubSup>
@@ -7225,8 +7224,8 @@
           </a:prstGeom>
         </p:spPr>
       </p:pic>
-      <mc:AlternateContent xmlns:mc="http://schemas.openxmlformats.org/markup-compatibility/2006">
-        <mc:Choice xmlns:a14="http://schemas.microsoft.com/office/drawing/2010/main" Requires="a14">
+      <mc:AlternateContent xmlns:mc="http://schemas.openxmlformats.org/markup-compatibility/2006" xmlns:a14="http://schemas.microsoft.com/office/drawing/2010/main">
+        <mc:Choice Requires="a14">
           <p:sp>
             <p:nvSpPr>
               <p:cNvPr id="19" name="矩形 18">
@@ -7287,7 +7286,7 @@
             </p:txBody>
           </p:sp>
         </mc:Choice>
-        <mc:Fallback>
+        <mc:Fallback xmlns="">
           <p:sp>
             <p:nvSpPr>
               <p:cNvPr id="19" name="矩形 18">
@@ -7332,8 +7331,8 @@
           </p:sp>
         </mc:Fallback>
       </mc:AlternateContent>
-      <mc:AlternateContent xmlns:mc="http://schemas.openxmlformats.org/markup-compatibility/2006">
-        <mc:Choice xmlns:a14="http://schemas.microsoft.com/office/drawing/2010/main" Requires="a14">
+      <mc:AlternateContent xmlns:mc="http://schemas.openxmlformats.org/markup-compatibility/2006" xmlns:a14="http://schemas.microsoft.com/office/drawing/2010/main">
+        <mc:Choice Requires="a14">
           <p:sp>
             <p:nvSpPr>
               <p:cNvPr id="20" name="矩形 19">
@@ -7400,7 +7399,7 @@
             </p:txBody>
           </p:sp>
         </mc:Choice>
-        <mc:Fallback>
+        <mc:Fallback xmlns="">
           <p:sp>
             <p:nvSpPr>
               <p:cNvPr id="20" name="矩形 19">
@@ -7445,8 +7444,8 @@
           </p:sp>
         </mc:Fallback>
       </mc:AlternateContent>
-      <mc:AlternateContent xmlns:mc="http://schemas.openxmlformats.org/markup-compatibility/2006">
-        <mc:Choice xmlns:a14="http://schemas.microsoft.com/office/drawing/2010/main" Requires="a14">
+      <mc:AlternateContent xmlns:mc="http://schemas.openxmlformats.org/markup-compatibility/2006" xmlns:a14="http://schemas.microsoft.com/office/drawing/2010/main">
+        <mc:Choice Requires="a14">
           <p:sp>
             <p:nvSpPr>
               <p:cNvPr id="40" name="矩形 39">
@@ -7572,13 +7571,7 @@
                                     <a:rPr lang="en-US" altLang="zh-TW" sz="2000" i="1">
                                       <a:latin typeface="Cambria Math" panose="02040503050406030204" pitchFamily="18" charset="0"/>
                                     </a:rPr>
-                                    <m:t>,</m:t>
-                                  </m:r>
-                                  <m:r>
-                                    <a:rPr lang="en-US" altLang="zh-TW" sz="2000" i="1">
-                                      <a:latin typeface="Cambria Math" panose="02040503050406030204" pitchFamily="18" charset="0"/>
-                                    </a:rPr>
-                                    <m:t>0</m:t>
+                                    <m:t>,0</m:t>
                                   </m:r>
                                 </m:sup>
                               </m:sSubSup>
@@ -7608,7 +7601,7 @@
             </p:txBody>
           </p:sp>
         </mc:Choice>
-        <mc:Fallback>
+        <mc:Fallback xmlns="">
           <p:sp>
             <p:nvSpPr>
               <p:cNvPr id="40" name="矩形 39">
@@ -7653,8 +7646,8 @@
           </p:sp>
         </mc:Fallback>
       </mc:AlternateContent>
-      <mc:AlternateContent xmlns:mc="http://schemas.openxmlformats.org/markup-compatibility/2006">
-        <mc:Choice xmlns:a14="http://schemas.microsoft.com/office/drawing/2010/main" Requires="a14">
+      <mc:AlternateContent xmlns:mc="http://schemas.openxmlformats.org/markup-compatibility/2006" xmlns:a14="http://schemas.microsoft.com/office/drawing/2010/main">
+        <mc:Choice Requires="a14">
           <p:sp>
             <p:nvSpPr>
               <p:cNvPr id="41" name="矩形 40">
@@ -7812,28 +7805,7 @@
                                           <a:latin typeface="Cambria Math" panose="02040503050406030204" pitchFamily="18" charset="0"/>
                                           <a:cs typeface="Times New Roman" panose="02020603050405020304" pitchFamily="18" charset="0"/>
                                         </a:rPr>
-                                        <m:t>, </m:t>
-                                      </m:r>
-                                      <m:r>
-                                        <a:rPr lang="en-US" altLang="zh-TW" sz="2000" i="1" dirty="0">
-                                          <a:latin typeface="Cambria Math" panose="02040503050406030204" pitchFamily="18" charset="0"/>
-                                          <a:cs typeface="Times New Roman" panose="02020603050405020304" pitchFamily="18" charset="0"/>
-                                        </a:rPr>
-                                        <m:t>0</m:t>
-                                      </m:r>
-                                      <m:r>
-                                        <a:rPr lang="en-US" altLang="zh-TW" sz="2000" i="1" dirty="0">
-                                          <a:latin typeface="Cambria Math" panose="02040503050406030204" pitchFamily="18" charset="0"/>
-                                          <a:cs typeface="Times New Roman" panose="02020603050405020304" pitchFamily="18" charset="0"/>
-                                        </a:rPr>
-                                        <m:t>,</m:t>
-                                      </m:r>
-                                      <m:r>
-                                        <a:rPr lang="en-US" altLang="zh-TW" sz="2000" i="1" dirty="0">
-                                          <a:latin typeface="Cambria Math" panose="02040503050406030204" pitchFamily="18" charset="0"/>
-                                          <a:cs typeface="Times New Roman" panose="02020603050405020304" pitchFamily="18" charset="0"/>
-                                        </a:rPr>
-                                        <m:t>0</m:t>
+                                        <m:t>, 0,0</m:t>
                                       </m:r>
                                     </m:sup>
                                   </m:sSubSup>
@@ -7927,7 +7899,7 @@
             </p:txBody>
           </p:sp>
         </mc:Choice>
-        <mc:Fallback>
+        <mc:Fallback xmlns="">
           <p:sp>
             <p:nvSpPr>
               <p:cNvPr id="41" name="矩形 40">
@@ -8232,8 +8204,8 @@
           </a:prstGeom>
         </p:spPr>
       </p:pic>
-      <mc:AlternateContent xmlns:mc="http://schemas.openxmlformats.org/markup-compatibility/2006">
-        <mc:Choice xmlns:a14="http://schemas.microsoft.com/office/drawing/2010/main" Requires="a14">
+      <mc:AlternateContent xmlns:mc="http://schemas.openxmlformats.org/markup-compatibility/2006" xmlns:a14="http://schemas.microsoft.com/office/drawing/2010/main">
+        <mc:Choice Requires="a14">
           <p:sp>
             <p:nvSpPr>
               <p:cNvPr id="8" name="矩形 7">
@@ -8389,13 +8361,7 @@
                                     <a:rPr lang="en-US" altLang="zh-TW" sz="2000" i="1">
                                       <a:latin typeface="Cambria Math" panose="02040503050406030204" pitchFamily="18" charset="0"/>
                                     </a:rPr>
-                                    <m:t>,</m:t>
-                                  </m:r>
-                                  <m:r>
-                                    <a:rPr lang="en-US" altLang="zh-TW" sz="2000" i="1">
-                                      <a:latin typeface="Cambria Math" panose="02040503050406030204" pitchFamily="18" charset="0"/>
-                                    </a:rPr>
-                                    <m:t>0</m:t>
+                                    <m:t>,0</m:t>
                                   </m:r>
                                 </m:sup>
                               </m:sSubSup>
@@ -8425,7 +8391,7 @@
             </p:txBody>
           </p:sp>
         </mc:Choice>
-        <mc:Fallback>
+        <mc:Fallback xmlns="">
           <p:sp>
             <p:nvSpPr>
               <p:cNvPr id="8" name="矩形 7">
@@ -8470,8 +8436,8 @@
           </p:sp>
         </mc:Fallback>
       </mc:AlternateContent>
-      <mc:AlternateContent xmlns:mc="http://schemas.openxmlformats.org/markup-compatibility/2006">
-        <mc:Choice xmlns:a14="http://schemas.microsoft.com/office/drawing/2010/main" Requires="a14">
+      <mc:AlternateContent xmlns:mc="http://schemas.openxmlformats.org/markup-compatibility/2006" xmlns:a14="http://schemas.microsoft.com/office/drawing/2010/main">
+        <mc:Choice Requires="a14">
           <p:sp>
             <p:nvSpPr>
               <p:cNvPr id="18" name="矩形 17">
@@ -8659,28 +8625,7 @@
                                           <a:latin typeface="Cambria Math" panose="02040503050406030204" pitchFamily="18" charset="0"/>
                                           <a:cs typeface="Times New Roman" panose="02020603050405020304" pitchFamily="18" charset="0"/>
                                         </a:rPr>
-                                        <m:t>, </m:t>
-                                      </m:r>
-                                      <m:r>
-                                        <a:rPr lang="en-US" altLang="zh-TW" sz="2000" i="1" dirty="0">
-                                          <a:latin typeface="Cambria Math" panose="02040503050406030204" pitchFamily="18" charset="0"/>
-                                          <a:cs typeface="Times New Roman" panose="02020603050405020304" pitchFamily="18" charset="0"/>
-                                        </a:rPr>
-                                        <m:t>0</m:t>
-                                      </m:r>
-                                      <m:r>
-                                        <a:rPr lang="en-US" altLang="zh-TW" sz="2000" i="1" dirty="0">
-                                          <a:latin typeface="Cambria Math" panose="02040503050406030204" pitchFamily="18" charset="0"/>
-                                          <a:cs typeface="Times New Roman" panose="02020603050405020304" pitchFamily="18" charset="0"/>
-                                        </a:rPr>
-                                        <m:t>,</m:t>
-                                      </m:r>
-                                      <m:r>
-                                        <a:rPr lang="en-US" altLang="zh-TW" sz="2000" i="1" dirty="0">
-                                          <a:latin typeface="Cambria Math" panose="02040503050406030204" pitchFamily="18" charset="0"/>
-                                          <a:cs typeface="Times New Roman" panose="02020603050405020304" pitchFamily="18" charset="0"/>
-                                        </a:rPr>
-                                        <m:t>0</m:t>
+                                        <m:t>, 0,0</m:t>
                                       </m:r>
                                     </m:sup>
                                   </m:sSubSup>
@@ -8774,7 +8719,7 @@
             </p:txBody>
           </p:sp>
         </mc:Choice>
-        <mc:Fallback>
+        <mc:Fallback xmlns="">
           <p:sp>
             <p:nvSpPr>
               <p:cNvPr id="18" name="矩形 17">
@@ -8819,8 +8764,8 @@
           </p:sp>
         </mc:Fallback>
       </mc:AlternateContent>
-      <mc:AlternateContent xmlns:mc="http://schemas.openxmlformats.org/markup-compatibility/2006">
-        <mc:Choice xmlns:a14="http://schemas.microsoft.com/office/drawing/2010/main" Requires="a14">
+      <mc:AlternateContent xmlns:mc="http://schemas.openxmlformats.org/markup-compatibility/2006" xmlns:a14="http://schemas.microsoft.com/office/drawing/2010/main">
+        <mc:Choice Requires="a14">
           <p:sp>
             <p:nvSpPr>
               <p:cNvPr id="19" name="矩形 18">
@@ -8881,7 +8826,7 @@
             </p:txBody>
           </p:sp>
         </mc:Choice>
-        <mc:Fallback>
+        <mc:Fallback xmlns="">
           <p:sp>
             <p:nvSpPr>
               <p:cNvPr id="19" name="矩形 18">
@@ -8926,8 +8871,8 @@
           </p:sp>
         </mc:Fallback>
       </mc:AlternateContent>
-      <mc:AlternateContent xmlns:mc="http://schemas.openxmlformats.org/markup-compatibility/2006">
-        <mc:Choice xmlns:a14="http://schemas.microsoft.com/office/drawing/2010/main" Requires="a14">
+      <mc:AlternateContent xmlns:mc="http://schemas.openxmlformats.org/markup-compatibility/2006" xmlns:a14="http://schemas.microsoft.com/office/drawing/2010/main">
+        <mc:Choice Requires="a14">
           <p:sp>
             <p:nvSpPr>
               <p:cNvPr id="20" name="矩形 19">
@@ -8994,7 +8939,7 @@
             </p:txBody>
           </p:sp>
         </mc:Choice>
-        <mc:Fallback>
+        <mc:Fallback xmlns="">
           <p:sp>
             <p:nvSpPr>
               <p:cNvPr id="20" name="矩形 19">
@@ -9403,8 +9348,8 @@
           </a:prstGeom>
         </p:spPr>
       </p:pic>
-      <mc:AlternateContent xmlns:mc="http://schemas.openxmlformats.org/markup-compatibility/2006">
-        <mc:Choice xmlns:a14="http://schemas.microsoft.com/office/drawing/2010/main" Requires="a14">
+      <mc:AlternateContent xmlns:mc="http://schemas.openxmlformats.org/markup-compatibility/2006" xmlns:a14="http://schemas.microsoft.com/office/drawing/2010/main">
+        <mc:Choice Requires="a14">
           <p:sp>
             <p:nvSpPr>
               <p:cNvPr id="8" name="矩形 7">
@@ -9560,13 +9505,7 @@
                                     <a:rPr lang="en-US" altLang="zh-TW" sz="2000" i="1">
                                       <a:latin typeface="Cambria Math" panose="02040503050406030204" pitchFamily="18" charset="0"/>
                                     </a:rPr>
-                                    <m:t>,</m:t>
-                                  </m:r>
-                                  <m:r>
-                                    <a:rPr lang="en-US" altLang="zh-TW" sz="2000" i="1">
-                                      <a:latin typeface="Cambria Math" panose="02040503050406030204" pitchFamily="18" charset="0"/>
-                                    </a:rPr>
-                                    <m:t>0</m:t>
+                                    <m:t>,0</m:t>
                                   </m:r>
                                 </m:sup>
                               </m:sSubSup>
@@ -9596,7 +9535,7 @@
             </p:txBody>
           </p:sp>
         </mc:Choice>
-        <mc:Fallback>
+        <mc:Fallback xmlns="">
           <p:sp>
             <p:nvSpPr>
               <p:cNvPr id="8" name="矩形 7">
@@ -9641,8 +9580,8 @@
           </p:sp>
         </mc:Fallback>
       </mc:AlternateContent>
-      <mc:AlternateContent xmlns:mc="http://schemas.openxmlformats.org/markup-compatibility/2006">
-        <mc:Choice xmlns:a14="http://schemas.microsoft.com/office/drawing/2010/main" Requires="a14">
+      <mc:AlternateContent xmlns:mc="http://schemas.openxmlformats.org/markup-compatibility/2006" xmlns:a14="http://schemas.microsoft.com/office/drawing/2010/main">
+        <mc:Choice Requires="a14">
           <p:sp>
             <p:nvSpPr>
               <p:cNvPr id="18" name="矩形 17">
@@ -9830,28 +9769,7 @@
                                           <a:latin typeface="Cambria Math" panose="02040503050406030204" pitchFamily="18" charset="0"/>
                                           <a:cs typeface="Times New Roman" panose="02020603050405020304" pitchFamily="18" charset="0"/>
                                         </a:rPr>
-                                        <m:t>, </m:t>
-                                      </m:r>
-                                      <m:r>
-                                        <a:rPr lang="en-US" altLang="zh-TW" sz="2000" i="1" dirty="0">
-                                          <a:latin typeface="Cambria Math" panose="02040503050406030204" pitchFamily="18" charset="0"/>
-                                          <a:cs typeface="Times New Roman" panose="02020603050405020304" pitchFamily="18" charset="0"/>
-                                        </a:rPr>
-                                        <m:t>0</m:t>
-                                      </m:r>
-                                      <m:r>
-                                        <a:rPr lang="en-US" altLang="zh-TW" sz="2000" i="1" dirty="0">
-                                          <a:latin typeface="Cambria Math" panose="02040503050406030204" pitchFamily="18" charset="0"/>
-                                          <a:cs typeface="Times New Roman" panose="02020603050405020304" pitchFamily="18" charset="0"/>
-                                        </a:rPr>
-                                        <m:t>,</m:t>
-                                      </m:r>
-                                      <m:r>
-                                        <a:rPr lang="en-US" altLang="zh-TW" sz="2000" i="1" dirty="0">
-                                          <a:latin typeface="Cambria Math" panose="02040503050406030204" pitchFamily="18" charset="0"/>
-                                          <a:cs typeface="Times New Roman" panose="02020603050405020304" pitchFamily="18" charset="0"/>
-                                        </a:rPr>
-                                        <m:t>0</m:t>
+                                        <m:t>, 0,0</m:t>
                                       </m:r>
                                     </m:sup>
                                   </m:sSubSup>
@@ -9945,7 +9863,7 @@
             </p:txBody>
           </p:sp>
         </mc:Choice>
-        <mc:Fallback>
+        <mc:Fallback xmlns="">
           <p:sp>
             <p:nvSpPr>
               <p:cNvPr id="18" name="矩形 17">
@@ -9990,8 +9908,8 @@
           </p:sp>
         </mc:Fallback>
       </mc:AlternateContent>
-      <mc:AlternateContent xmlns:mc="http://schemas.openxmlformats.org/markup-compatibility/2006">
-        <mc:Choice xmlns:a14="http://schemas.microsoft.com/office/drawing/2010/main" Requires="a14">
+      <mc:AlternateContent xmlns:mc="http://schemas.openxmlformats.org/markup-compatibility/2006" xmlns:a14="http://schemas.microsoft.com/office/drawing/2010/main">
+        <mc:Choice Requires="a14">
           <p:sp>
             <p:nvSpPr>
               <p:cNvPr id="19" name="矩形 18">
@@ -10052,7 +9970,7 @@
             </p:txBody>
           </p:sp>
         </mc:Choice>
-        <mc:Fallback>
+        <mc:Fallback xmlns="">
           <p:sp>
             <p:nvSpPr>
               <p:cNvPr id="19" name="矩形 18">
@@ -10097,8 +10015,8 @@
           </p:sp>
         </mc:Fallback>
       </mc:AlternateContent>
-      <mc:AlternateContent xmlns:mc="http://schemas.openxmlformats.org/markup-compatibility/2006">
-        <mc:Choice xmlns:a14="http://schemas.microsoft.com/office/drawing/2010/main" Requires="a14">
+      <mc:AlternateContent xmlns:mc="http://schemas.openxmlformats.org/markup-compatibility/2006" xmlns:a14="http://schemas.microsoft.com/office/drawing/2010/main">
+        <mc:Choice Requires="a14">
           <p:sp>
             <p:nvSpPr>
               <p:cNvPr id="20" name="矩形 19">
@@ -10165,7 +10083,7 @@
             </p:txBody>
           </p:sp>
         </mc:Choice>
-        <mc:Fallback>
+        <mc:Fallback xmlns="">
           <p:sp>
             <p:nvSpPr>
               <p:cNvPr id="20" name="矩形 19">
@@ -10459,8 +10377,8 @@
           </a:prstGeom>
         </p:spPr>
       </p:pic>
-      <mc:AlternateContent xmlns:mc="http://schemas.openxmlformats.org/markup-compatibility/2006">
-        <mc:Choice xmlns:a14="http://schemas.microsoft.com/office/drawing/2010/main" Requires="a14">
+      <mc:AlternateContent xmlns:mc="http://schemas.openxmlformats.org/markup-compatibility/2006" xmlns:a14="http://schemas.microsoft.com/office/drawing/2010/main">
+        <mc:Choice Requires="a14">
           <p:sp>
             <p:nvSpPr>
               <p:cNvPr id="7" name="矩形 6">
@@ -10651,7 +10569,7 @@
             </p:txBody>
           </p:sp>
         </mc:Choice>
-        <mc:Fallback>
+        <mc:Fallback xmlns="">
           <p:sp>
             <p:nvSpPr>
               <p:cNvPr id="7" name="矩形 6">
@@ -10696,8 +10614,8 @@
           </p:sp>
         </mc:Fallback>
       </mc:AlternateContent>
-      <mc:AlternateContent xmlns:mc="http://schemas.openxmlformats.org/markup-compatibility/2006">
-        <mc:Choice xmlns:a14="http://schemas.microsoft.com/office/drawing/2010/main" Requires="a14">
+      <mc:AlternateContent xmlns:mc="http://schemas.openxmlformats.org/markup-compatibility/2006" xmlns:a14="http://schemas.microsoft.com/office/drawing/2010/main">
+        <mc:Choice Requires="a14">
           <p:sp>
             <p:nvSpPr>
               <p:cNvPr id="21" name="文字方塊 20">
@@ -10772,7 +10690,7 @@
             </p:txBody>
           </p:sp>
         </mc:Choice>
-        <mc:Fallback>
+        <mc:Fallback xmlns="">
           <p:sp>
             <p:nvSpPr>
               <p:cNvPr id="21" name="文字方塊 20">
@@ -11426,8 +11344,8 @@
           </a:prstGeom>
         </p:spPr>
       </p:pic>
-      <mc:AlternateContent xmlns:mc="http://schemas.openxmlformats.org/markup-compatibility/2006">
-        <mc:Choice xmlns:a14="http://schemas.microsoft.com/office/drawing/2010/main" Requires="a14">
+      <mc:AlternateContent xmlns:mc="http://schemas.openxmlformats.org/markup-compatibility/2006" xmlns:a14="http://schemas.microsoft.com/office/drawing/2010/main">
+        <mc:Choice Requires="a14">
           <p:sp>
             <p:nvSpPr>
               <p:cNvPr id="8" name="矩形 7">
@@ -11583,7 +11501,7 @@
             </p:txBody>
           </p:sp>
         </mc:Choice>
-        <mc:Fallback>
+        <mc:Fallback xmlns="">
           <p:sp>
             <p:nvSpPr>
               <p:cNvPr id="8" name="矩形 7">
@@ -11628,8 +11546,8 @@
           </p:sp>
         </mc:Fallback>
       </mc:AlternateContent>
-      <mc:AlternateContent xmlns:mc="http://schemas.openxmlformats.org/markup-compatibility/2006">
-        <mc:Choice xmlns:a14="http://schemas.microsoft.com/office/drawing/2010/main" Requires="a14">
+      <mc:AlternateContent xmlns:mc="http://schemas.openxmlformats.org/markup-compatibility/2006" xmlns:a14="http://schemas.microsoft.com/office/drawing/2010/main">
+        <mc:Choice Requires="a14">
           <p:sp>
             <p:nvSpPr>
               <p:cNvPr id="10" name="矩形 9">
@@ -11697,7 +11615,7 @@
             </p:txBody>
           </p:sp>
         </mc:Choice>
-        <mc:Fallback>
+        <mc:Fallback xmlns="">
           <p:sp>
             <p:nvSpPr>
               <p:cNvPr id="10" name="矩形 9">
@@ -11830,8 +11748,8 @@
           </a:fontRef>
         </p:style>
       </p:cxnSp>
-      <mc:AlternateContent xmlns:mc="http://schemas.openxmlformats.org/markup-compatibility/2006">
-        <mc:Choice xmlns:a14="http://schemas.microsoft.com/office/drawing/2010/main" Requires="a14">
+      <mc:AlternateContent xmlns:mc="http://schemas.openxmlformats.org/markup-compatibility/2006" xmlns:a14="http://schemas.microsoft.com/office/drawing/2010/main">
+        <mc:Choice Requires="a14">
           <p:sp>
             <p:nvSpPr>
               <p:cNvPr id="13" name="矩形 12">
@@ -11880,7 +11798,7 @@
             </p:txBody>
           </p:sp>
         </mc:Choice>
-        <mc:Fallback>
+        <mc:Fallback xmlns="">
           <p:sp>
             <p:nvSpPr>
               <p:cNvPr id="13" name="矩形 12">
@@ -11925,8 +11843,8 @@
           </p:sp>
         </mc:Fallback>
       </mc:AlternateContent>
-      <mc:AlternateContent xmlns:mc="http://schemas.openxmlformats.org/markup-compatibility/2006">
-        <mc:Choice xmlns:a14="http://schemas.microsoft.com/office/drawing/2010/main" Requires="a14">
+      <mc:AlternateContent xmlns:mc="http://schemas.openxmlformats.org/markup-compatibility/2006" xmlns:a14="http://schemas.microsoft.com/office/drawing/2010/main">
+        <mc:Choice Requires="a14">
           <p:sp>
             <p:nvSpPr>
               <p:cNvPr id="14" name="矩形 13">
@@ -11975,7 +11893,7 @@
             </p:txBody>
           </p:sp>
         </mc:Choice>
-        <mc:Fallback>
+        <mc:Fallback xmlns="">
           <p:sp>
             <p:nvSpPr>
               <p:cNvPr id="14" name="矩形 13">
@@ -12020,8 +11938,8 @@
           </p:sp>
         </mc:Fallback>
       </mc:AlternateContent>
-      <mc:AlternateContent xmlns:mc="http://schemas.openxmlformats.org/markup-compatibility/2006">
-        <mc:Choice xmlns:a14="http://schemas.microsoft.com/office/drawing/2010/main" Requires="a14">
+      <mc:AlternateContent xmlns:mc="http://schemas.openxmlformats.org/markup-compatibility/2006" xmlns:a14="http://schemas.microsoft.com/office/drawing/2010/main">
+        <mc:Choice Requires="a14">
           <p:sp>
             <p:nvSpPr>
               <p:cNvPr id="18" name="矩形 17">
@@ -12273,7 +12191,7 @@
             </p:txBody>
           </p:sp>
         </mc:Choice>
-        <mc:Fallback>
+        <mc:Fallback xmlns="">
           <p:sp>
             <p:nvSpPr>
               <p:cNvPr id="18" name="矩形 17">
@@ -12318,8 +12236,8 @@
           </p:sp>
         </mc:Fallback>
       </mc:AlternateContent>
-      <mc:AlternateContent xmlns:mc="http://schemas.openxmlformats.org/markup-compatibility/2006">
-        <mc:Choice xmlns:a14="http://schemas.microsoft.com/office/drawing/2010/main" Requires="a14">
+      <mc:AlternateContent xmlns:mc="http://schemas.openxmlformats.org/markup-compatibility/2006" xmlns:a14="http://schemas.microsoft.com/office/drawing/2010/main">
+        <mc:Choice Requires="a14">
           <p:sp>
             <p:nvSpPr>
               <p:cNvPr id="19" name="矩形 18">
@@ -12380,7 +12298,7 @@
             </p:txBody>
           </p:sp>
         </mc:Choice>
-        <mc:Fallback>
+        <mc:Fallback xmlns="">
           <p:sp>
             <p:nvSpPr>
               <p:cNvPr id="19" name="矩形 18">
@@ -12425,8 +12343,8 @@
           </p:sp>
         </mc:Fallback>
       </mc:AlternateContent>
-      <mc:AlternateContent xmlns:mc="http://schemas.openxmlformats.org/markup-compatibility/2006">
-        <mc:Choice xmlns:a14="http://schemas.microsoft.com/office/drawing/2010/main" Requires="a14">
+      <mc:AlternateContent xmlns:mc="http://schemas.openxmlformats.org/markup-compatibility/2006" xmlns:a14="http://schemas.microsoft.com/office/drawing/2010/main">
+        <mc:Choice Requires="a14">
           <p:sp>
             <p:nvSpPr>
               <p:cNvPr id="20" name="矩形 19">
@@ -12493,7 +12411,7 @@
             </p:txBody>
           </p:sp>
         </mc:Choice>
-        <mc:Fallback>
+        <mc:Fallback xmlns="">
           <p:sp>
             <p:nvSpPr>
               <p:cNvPr id="20" name="矩形 19">
@@ -12538,8 +12456,8 @@
           </p:sp>
         </mc:Fallback>
       </mc:AlternateContent>
-      <mc:AlternateContent xmlns:mc="http://schemas.openxmlformats.org/markup-compatibility/2006">
-        <mc:Choice xmlns:a14="http://schemas.microsoft.com/office/drawing/2010/main" Requires="a14">
+      <mc:AlternateContent xmlns:mc="http://schemas.openxmlformats.org/markup-compatibility/2006" xmlns:a14="http://schemas.microsoft.com/office/drawing/2010/main">
+        <mc:Choice Requires="a14">
           <p:sp>
             <p:nvSpPr>
               <p:cNvPr id="21" name="文字方塊 20">
@@ -12614,7 +12532,7 @@
             </p:txBody>
           </p:sp>
         </mc:Choice>
-        <mc:Fallback>
+        <mc:Fallback xmlns="">
           <p:sp>
             <p:nvSpPr>
               <p:cNvPr id="21" name="文字方塊 20">
@@ -13223,8 +13141,8 @@
           </a:p>
         </p:txBody>
       </p:sp>
-      <mc:AlternateContent xmlns:mc="http://schemas.openxmlformats.org/markup-compatibility/2006">
-        <mc:Choice xmlns:a14="http://schemas.microsoft.com/office/drawing/2010/main" Requires="a14">
+      <mc:AlternateContent xmlns:mc="http://schemas.openxmlformats.org/markup-compatibility/2006" xmlns:a14="http://schemas.microsoft.com/office/drawing/2010/main">
+        <mc:Choice Requires="a14">
           <p:sp>
             <p:nvSpPr>
               <p:cNvPr id="19" name="矩形 18">
@@ -13285,7 +13203,7 @@
             </p:txBody>
           </p:sp>
         </mc:Choice>
-        <mc:Fallback>
+        <mc:Fallback xmlns="">
           <p:sp>
             <p:nvSpPr>
               <p:cNvPr id="19" name="矩形 18">
@@ -13330,8 +13248,8 @@
           </p:sp>
         </mc:Fallback>
       </mc:AlternateContent>
-      <mc:AlternateContent xmlns:mc="http://schemas.openxmlformats.org/markup-compatibility/2006">
-        <mc:Choice xmlns:a14="http://schemas.microsoft.com/office/drawing/2010/main" Requires="a14">
+      <mc:AlternateContent xmlns:mc="http://schemas.openxmlformats.org/markup-compatibility/2006" xmlns:a14="http://schemas.microsoft.com/office/drawing/2010/main">
+        <mc:Choice Requires="a14">
           <p:sp>
             <p:nvSpPr>
               <p:cNvPr id="20" name="矩形 19">
@@ -13398,7 +13316,7 @@
             </p:txBody>
           </p:sp>
         </mc:Choice>
-        <mc:Fallback>
+        <mc:Fallback xmlns="">
           <p:sp>
             <p:nvSpPr>
               <p:cNvPr id="20" name="矩形 19">
@@ -13443,8 +13361,8 @@
           </p:sp>
         </mc:Fallback>
       </mc:AlternateContent>
-      <mc:AlternateContent xmlns:mc="http://schemas.openxmlformats.org/markup-compatibility/2006">
-        <mc:Choice xmlns:a14="http://schemas.microsoft.com/office/drawing/2010/main" Requires="a14">
+      <mc:AlternateContent xmlns:mc="http://schemas.openxmlformats.org/markup-compatibility/2006" xmlns:a14="http://schemas.microsoft.com/office/drawing/2010/main">
+        <mc:Choice Requires="a14">
           <p:sp>
             <p:nvSpPr>
               <p:cNvPr id="40" name="矩形 39">
@@ -13570,13 +13488,7 @@
                                     <a:rPr lang="en-US" altLang="zh-TW" sz="2000" i="1">
                                       <a:latin typeface="Cambria Math" panose="02040503050406030204" pitchFamily="18" charset="0"/>
                                     </a:rPr>
-                                    <m:t>,</m:t>
-                                  </m:r>
-                                  <m:r>
-                                    <a:rPr lang="en-US" altLang="zh-TW" sz="2000" i="1">
-                                      <a:latin typeface="Cambria Math" panose="02040503050406030204" pitchFamily="18" charset="0"/>
-                                    </a:rPr>
-                                    <m:t>1</m:t>
+                                    <m:t>,1</m:t>
                                   </m:r>
                                 </m:sup>
                               </m:sSubSup>
@@ -13606,7 +13518,7 @@
             </p:txBody>
           </p:sp>
         </mc:Choice>
-        <mc:Fallback>
+        <mc:Fallback xmlns="">
           <p:sp>
             <p:nvSpPr>
               <p:cNvPr id="40" name="矩形 39">
@@ -13651,8 +13563,8 @@
           </p:sp>
         </mc:Fallback>
       </mc:AlternateContent>
-      <mc:AlternateContent xmlns:mc="http://schemas.openxmlformats.org/markup-compatibility/2006">
-        <mc:Choice xmlns:a14="http://schemas.microsoft.com/office/drawing/2010/main" Requires="a14">
+      <mc:AlternateContent xmlns:mc="http://schemas.openxmlformats.org/markup-compatibility/2006" xmlns:a14="http://schemas.microsoft.com/office/drawing/2010/main">
+        <mc:Choice Requires="a14">
           <p:sp>
             <p:nvSpPr>
               <p:cNvPr id="41" name="矩形 40">
@@ -13810,14 +13722,7 @@
                                           <a:latin typeface="Cambria Math" panose="02040503050406030204" pitchFamily="18" charset="0"/>
                                           <a:cs typeface="Times New Roman" panose="02020603050405020304" pitchFamily="18" charset="0"/>
                                         </a:rPr>
-                                        <m:t>, </m:t>
-                                      </m:r>
-                                      <m:r>
-                                        <a:rPr lang="en-US" altLang="zh-TW" sz="2000" i="1" dirty="0">
-                                          <a:latin typeface="Cambria Math" panose="02040503050406030204" pitchFamily="18" charset="0"/>
-                                          <a:cs typeface="Times New Roman" panose="02020603050405020304" pitchFamily="18" charset="0"/>
-                                        </a:rPr>
-                                        <m:t>1</m:t>
+                                        <m:t>, 1</m:t>
                                       </m:r>
                                     </m:sup>
                                   </m:sSubSup>
@@ -13911,7 +13816,7 @@
             </p:txBody>
           </p:sp>
         </mc:Choice>
-        <mc:Fallback>
+        <mc:Fallback xmlns="">
           <p:sp>
             <p:nvSpPr>
               <p:cNvPr id="41" name="矩形 40">
@@ -14216,8 +14121,8 @@
           </a:prstGeom>
         </p:spPr>
       </p:pic>
-      <mc:AlternateContent xmlns:mc="http://schemas.openxmlformats.org/markup-compatibility/2006">
-        <mc:Choice xmlns:a14="http://schemas.microsoft.com/office/drawing/2010/main" Requires="a14">
+      <mc:AlternateContent xmlns:mc="http://schemas.openxmlformats.org/markup-compatibility/2006" xmlns:a14="http://schemas.microsoft.com/office/drawing/2010/main">
+        <mc:Choice Requires="a14">
           <p:sp>
             <p:nvSpPr>
               <p:cNvPr id="8" name="矩形 7">
@@ -14373,13 +14278,7 @@
                                     <a:rPr lang="en-US" altLang="zh-TW" sz="2000" i="1">
                                       <a:latin typeface="Cambria Math" panose="02040503050406030204" pitchFamily="18" charset="0"/>
                                     </a:rPr>
-                                    <m:t>,</m:t>
-                                  </m:r>
-                                  <m:r>
-                                    <a:rPr lang="en-US" altLang="zh-TW" sz="2000" i="1">
-                                      <a:latin typeface="Cambria Math" panose="02040503050406030204" pitchFamily="18" charset="0"/>
-                                    </a:rPr>
-                                    <m:t>1</m:t>
+                                    <m:t>,1</m:t>
                                   </m:r>
                                 </m:sup>
                               </m:sSubSup>
@@ -14409,7 +14308,7 @@
             </p:txBody>
           </p:sp>
         </mc:Choice>
-        <mc:Fallback>
+        <mc:Fallback xmlns="">
           <p:sp>
             <p:nvSpPr>
               <p:cNvPr id="8" name="矩形 7">
@@ -14454,8 +14353,8 @@
           </p:sp>
         </mc:Fallback>
       </mc:AlternateContent>
-      <mc:AlternateContent xmlns:mc="http://schemas.openxmlformats.org/markup-compatibility/2006">
-        <mc:Choice xmlns:a14="http://schemas.microsoft.com/office/drawing/2010/main" Requires="a14">
+      <mc:AlternateContent xmlns:mc="http://schemas.openxmlformats.org/markup-compatibility/2006" xmlns:a14="http://schemas.microsoft.com/office/drawing/2010/main">
+        <mc:Choice Requires="a14">
           <p:sp>
             <p:nvSpPr>
               <p:cNvPr id="18" name="矩形 17">
@@ -14643,14 +14542,7 @@
                                           <a:latin typeface="Cambria Math" panose="02040503050406030204" pitchFamily="18" charset="0"/>
                                           <a:cs typeface="Times New Roman" panose="02020603050405020304" pitchFamily="18" charset="0"/>
                                         </a:rPr>
-                                        <m:t>, </m:t>
-                                      </m:r>
-                                      <m:r>
-                                        <a:rPr lang="en-US" altLang="zh-TW" sz="2000" i="1" dirty="0">
-                                          <a:latin typeface="Cambria Math" panose="02040503050406030204" pitchFamily="18" charset="0"/>
-                                          <a:cs typeface="Times New Roman" panose="02020603050405020304" pitchFamily="18" charset="0"/>
-                                        </a:rPr>
-                                        <m:t>1</m:t>
+                                        <m:t>, 1</m:t>
                                       </m:r>
                                     </m:sup>
                                   </m:sSubSup>
@@ -14744,7 +14636,7 @@
             </p:txBody>
           </p:sp>
         </mc:Choice>
-        <mc:Fallback>
+        <mc:Fallback xmlns="">
           <p:sp>
             <p:nvSpPr>
               <p:cNvPr id="18" name="矩形 17">
@@ -14789,8 +14681,8 @@
           </p:sp>
         </mc:Fallback>
       </mc:AlternateContent>
-      <mc:AlternateContent xmlns:mc="http://schemas.openxmlformats.org/markup-compatibility/2006">
-        <mc:Choice xmlns:a14="http://schemas.microsoft.com/office/drawing/2010/main" Requires="a14">
+      <mc:AlternateContent xmlns:mc="http://schemas.openxmlformats.org/markup-compatibility/2006" xmlns:a14="http://schemas.microsoft.com/office/drawing/2010/main">
+        <mc:Choice Requires="a14">
           <p:sp>
             <p:nvSpPr>
               <p:cNvPr id="19" name="矩形 18">
@@ -14851,7 +14743,7 @@
             </p:txBody>
           </p:sp>
         </mc:Choice>
-        <mc:Fallback>
+        <mc:Fallback xmlns="">
           <p:sp>
             <p:nvSpPr>
               <p:cNvPr id="19" name="矩形 18">
@@ -14896,8 +14788,8 @@
           </p:sp>
         </mc:Fallback>
       </mc:AlternateContent>
-      <mc:AlternateContent xmlns:mc="http://schemas.openxmlformats.org/markup-compatibility/2006">
-        <mc:Choice xmlns:a14="http://schemas.microsoft.com/office/drawing/2010/main" Requires="a14">
+      <mc:AlternateContent xmlns:mc="http://schemas.openxmlformats.org/markup-compatibility/2006" xmlns:a14="http://schemas.microsoft.com/office/drawing/2010/main">
+        <mc:Choice Requires="a14">
           <p:sp>
             <p:nvSpPr>
               <p:cNvPr id="20" name="矩形 19">
@@ -14964,7 +14856,7 @@
             </p:txBody>
           </p:sp>
         </mc:Choice>
-        <mc:Fallback>
+        <mc:Fallback xmlns="">
           <p:sp>
             <p:nvSpPr>
               <p:cNvPr id="20" name="矩形 19">
